--- a/docs/Z-MAX基线版硬件配置培训.pptx
+++ b/docs/Z-MAX基线版硬件配置培训.pptx
@@ -4790,7 +4790,7 @@
               </a:defRPr>
             </a:pPr>
             <a:r>
-              <a:t>🏋️  训练控制台 — SmolVLA DiffusionPolicy 端到端训练</a:t>
+              <a:t>🏋️  训练控制台 — VTLA DiffusionPolicy 端到端训练</a:t>
             </a:r>
           </a:p>
           <a:p>
@@ -5239,7 +5239,7 @@
               </a:defRPr>
             </a:pPr>
             <a:r>
-              <a:t>│  关键工序良率         ≥99.2% (L2基线)                  │</a:t>
+              <a:t>│  关键工序良率         大于99% (L2基线)                  │</a:t>
             </a:r>
           </a:p>
           <a:p>
@@ -5342,7 +5342,7 @@
               </a:defRPr>
             </a:pPr>
             <a:r>
-              <a:t>12路硬件 · 21节点 · 1ms控制 · ≥99.2%良率</a:t>
+              <a:t>12路硬件 · 21节点 · 1ms控制 · 大于99%良率</a:t>
             </a:r>
           </a:p>
         </p:txBody>
